--- a/Presentation.pptx
+++ b/Presentation.pptx
@@ -10,6 +10,7 @@
     <p:sldId id="259" r:id="rId4"/>
     <p:sldId id="260" r:id="rId5"/>
     <p:sldId id="261" r:id="rId6"/>
+    <p:sldId id="262" r:id="rId7"/>
   </p:sldIdLst>
   <p:sldSz cx="12192000" cy="6858000"/>
   <p:notesSz cx="6858000" cy="9144000"/>
@@ -4495,13 +4496,8 @@
             </a:pPr>
             <a:r>
               <a:rPr lang="en-US" dirty="0"/>
-              <a:t>GET </a:t>
-            </a:r>
-            <a:r>
-              <a:rPr lang="en-US"/>
-              <a:t>/analytics/</a:t>
-            </a:r>
-            <a:endParaRPr lang="en-US" dirty="0"/>
+              <a:t>GET /analytics/</a:t>
+            </a:r>
           </a:p>
         </p:txBody>
       </p:sp>
@@ -4509,6 +4505,139 @@
     <p:extLst>
       <p:ext uri="{BB962C8B-B14F-4D97-AF65-F5344CB8AC3E}">
         <p14:creationId xmlns:p14="http://schemas.microsoft.com/office/powerpoint/2010/main" val="3574002379"/>
+      </p:ext>
+    </p:extLst>
+  </p:cSld>
+  <p:clrMapOvr>
+    <a:masterClrMapping/>
+  </p:clrMapOvr>
+</p:sld>
+</file>
+
+<file path=ppt/slides/slide6.xml><?xml version="1.0" encoding="utf-8"?>
+<p:sld xmlns:a="http://schemas.openxmlformats.org/drawingml/2006/main" xmlns:r="http://schemas.openxmlformats.org/officeDocument/2006/relationships" xmlns:p="http://schemas.openxmlformats.org/presentationml/2006/main">
+  <p:cSld>
+    <p:spTree>
+      <p:nvGrpSpPr>
+        <p:cNvPr id="1" name="">
+          <a:extLst>
+            <a:ext uri="{FF2B5EF4-FFF2-40B4-BE49-F238E27FC236}">
+              <a16:creationId xmlns:a16="http://schemas.microsoft.com/office/drawing/2014/main" id="{91D4B14A-3294-E865-C21E-FBA7025594E9}"/>
+            </a:ext>
+          </a:extLst>
+        </p:cNvPr>
+        <p:cNvGrpSpPr/>
+        <p:nvPr/>
+      </p:nvGrpSpPr>
+      <p:grpSpPr>
+        <a:xfrm>
+          <a:off x="0" y="0"/>
+          <a:ext cx="0" cy="0"/>
+          <a:chOff x="0" y="0"/>
+          <a:chExt cx="0" cy="0"/>
+        </a:xfrm>
+      </p:grpSpPr>
+      <p:sp>
+        <p:nvSpPr>
+          <p:cNvPr id="2" name="Title 1">
+            <a:extLst>
+              <a:ext uri="{FF2B5EF4-FFF2-40B4-BE49-F238E27FC236}">
+                <a16:creationId xmlns:a16="http://schemas.microsoft.com/office/drawing/2014/main" id="{5EF1E1E3-2369-5C0C-2DD4-C4F50E6A77BA}"/>
+              </a:ext>
+            </a:extLst>
+          </p:cNvPr>
+          <p:cNvSpPr>
+            <a:spLocks noGrp="1"/>
+          </p:cNvSpPr>
+          <p:nvPr>
+            <p:ph type="title"/>
+          </p:nvPr>
+        </p:nvSpPr>
+        <p:spPr>
+          <a:xfrm>
+            <a:off x="1371600" y="685800"/>
+            <a:ext cx="9601200" cy="896257"/>
+          </a:xfrm>
+        </p:spPr>
+        <p:txBody>
+          <a:bodyPr>
+            <a:normAutofit/>
+          </a:bodyPr>
+          <a:lstStyle/>
+          <a:p>
+            <a:r>
+              <a:rPr lang="en-US" dirty="0"/>
+              <a:t>Version Control</a:t>
+            </a:r>
+          </a:p>
+        </p:txBody>
+      </p:sp>
+      <p:sp>
+        <p:nvSpPr>
+          <p:cNvPr id="3" name="Content Placeholder 2">
+            <a:extLst>
+              <a:ext uri="{FF2B5EF4-FFF2-40B4-BE49-F238E27FC236}">
+                <a16:creationId xmlns:a16="http://schemas.microsoft.com/office/drawing/2014/main" id="{FFCC49FB-41FF-8D38-4209-997A65286D8D}"/>
+              </a:ext>
+            </a:extLst>
+          </p:cNvPr>
+          <p:cNvSpPr>
+            <a:spLocks noGrp="1"/>
+          </p:cNvSpPr>
+          <p:nvPr>
+            <p:ph idx="1"/>
+          </p:nvPr>
+        </p:nvSpPr>
+        <p:spPr>
+          <a:xfrm>
+            <a:off x="1371600" y="1582057"/>
+            <a:ext cx="9601200" cy="4285343"/>
+          </a:xfrm>
+        </p:spPr>
+        <p:txBody>
+          <a:bodyPr/>
+          <a:lstStyle/>
+          <a:p>
+            <a:r>
+              <a:rPr lang="en-US" dirty="0"/>
+              <a:t>Throughout the project I used Git to incrementally commit changes, usually after every feature or fix. This way, each commit represents a unit of work, and it is easy to roll back to a previous working version to find a bug if the app stops working.</a:t>
+            </a:r>
+          </a:p>
+          <a:p>
+            <a:r>
+              <a:rPr lang="en-US" dirty="0"/>
+              <a:t>A git ignore file is used to remove any files that should not be committed such as .env files and .db files. </a:t>
+            </a:r>
+          </a:p>
+          <a:p>
+            <a:r>
+              <a:rPr lang="en-US" dirty="0"/>
+              <a:t>Database files are not committed for the purpose of keeping the repository lightweight. Since it is already easy to set up the app, it does not add much complexity to generate the database from the dataset on set up.</a:t>
+            </a:r>
+          </a:p>
+          <a:p>
+            <a:r>
+              <a:rPr lang="en-US" dirty="0"/>
+              <a:t>To imitate team environments, branches were used for distinct features.</a:t>
+            </a:r>
+          </a:p>
+          <a:p>
+            <a:r>
+              <a:rPr lang="en-US" dirty="0"/>
+              <a:t>One limitation would be that code reviews were not performed before each push or merge, which is a common practice </a:t>
+            </a:r>
+            <a:r>
+              <a:rPr lang="en-US"/>
+              <a:t>in team-based development.</a:t>
+            </a:r>
+            <a:endParaRPr lang="en-US" dirty="0"/>
+          </a:p>
+        </p:txBody>
+      </p:sp>
+    </p:spTree>
+    <p:extLst>
+      <p:ext uri="{BB962C8B-B14F-4D97-AF65-F5344CB8AC3E}">
+        <p14:creationId xmlns:p14="http://schemas.microsoft.com/office/powerpoint/2010/main" val="2249047937"/>
       </p:ext>
     </p:extLst>
   </p:cSld>

--- a/Presentation.pptx
+++ b/Presentation.pptx
@@ -11,6 +11,8 @@
     <p:sldId id="260" r:id="rId5"/>
     <p:sldId id="261" r:id="rId6"/>
     <p:sldId id="262" r:id="rId7"/>
+    <p:sldId id="263" r:id="rId8"/>
+    <p:sldId id="264" r:id="rId9"/>
   </p:sldIdLst>
   <p:sldSz cx="12192000" cy="6858000"/>
   <p:notesSz cx="6858000" cy="9144000"/>
@@ -4054,16 +4056,42 @@
         <p:spPr>
           <a:xfrm>
             <a:off x="1371600" y="1582057"/>
-            <a:ext cx="9601200" cy="4285343"/>
-          </a:xfrm>
-        </p:spPr>
-        <p:txBody>
-          <a:bodyPr/>
+            <a:ext cx="9601200" cy="4775200"/>
+          </a:xfrm>
+        </p:spPr>
+        <p:txBody>
+          <a:bodyPr>
+            <a:normAutofit/>
+          </a:bodyPr>
           <a:lstStyle/>
           <a:p>
             <a:r>
               <a:rPr lang="en-US" dirty="0"/>
-              <a:t>BookVault API provides a set of endpoints relating to books and their metadata. It allows users to access information from the Goodreads books dataset from Kaggle such as a book’s name, author, publication date, etc. as well as rating information such as a book’s average rating. </a:t>
+              <a:t>BookVault API provides a set of endpoints relating to books and their metadata. It allows users to access information from the Goodreads books dataset from Kaggle such as a book’s name, author, publication date, etc. as well as rating information such as a book’s average rating.</a:t>
+            </a:r>
+          </a:p>
+          <a:p>
+            <a:endParaRPr lang="en-US" dirty="0"/>
+          </a:p>
+          <a:p>
+            <a:pPr marL="0" indent="0">
+              <a:buNone/>
+            </a:pPr>
+            <a:endParaRPr lang="en-US" dirty="0"/>
+          </a:p>
+          <a:p>
+            <a:pPr marL="0" indent="0">
+              <a:buNone/>
+            </a:pPr>
+            <a:endParaRPr lang="en-US" dirty="0"/>
+          </a:p>
+          <a:p>
+            <a:pPr marL="0" indent="0">
+              <a:buNone/>
+            </a:pPr>
+            <a:r>
+              <a:rPr lang="en-US" dirty="0"/>
+              <a:t> </a:t>
             </a:r>
           </a:p>
           <a:p>
@@ -4075,11 +4103,105 @@
           <a:p>
             <a:r>
               <a:rPr lang="en-US" dirty="0"/>
-              <a:t>I chose books for this coursework because it was part of an idea for a personal project that I intended to create. It would allow me to become more comfortable with how to handle book data.</a:t>
-            </a:r>
-          </a:p>
-        </p:txBody>
-      </p:sp>
+              <a:t>I chose books for this coursework because it was part of an idea for a personal project that I intended to create.</a:t>
+            </a:r>
+          </a:p>
+        </p:txBody>
+      </p:sp>
+      <p:pic>
+        <p:nvPicPr>
+          <p:cNvPr id="1026" name="Picture 2" descr="Introducing Our New Logo, and More Ways We Continue to Improve Goodreads -  Goodreads News &amp; Interviews">
+            <a:extLst>
+              <a:ext uri="{FF2B5EF4-FFF2-40B4-BE49-F238E27FC236}">
+                <a16:creationId xmlns:a16="http://schemas.microsoft.com/office/drawing/2014/main" id="{403A1CAF-BC7D-D39D-B37E-EE089E163370}"/>
+              </a:ext>
+            </a:extLst>
+          </p:cNvPr>
+          <p:cNvPicPr>
+            <a:picLocks noChangeAspect="1" noChangeArrowheads="1"/>
+          </p:cNvPicPr>
+          <p:nvPr/>
+        </p:nvPicPr>
+        <p:blipFill>
+          <a:blip r:embed="rId2">
+            <a:extLst>
+              <a:ext uri="{28A0092B-C50C-407E-A947-70E740481C1C}">
+                <a14:useLocalDpi xmlns:a14="http://schemas.microsoft.com/office/drawing/2010/main" val="0"/>
+              </a:ext>
+            </a:extLst>
+          </a:blip>
+          <a:srcRect/>
+          <a:stretch>
+            <a:fillRect/>
+          </a:stretch>
+        </p:blipFill>
+        <p:spPr bwMode="auto">
+          <a:xfrm>
+            <a:off x="1712685" y="2889206"/>
+            <a:ext cx="4160157" cy="1584822"/>
+          </a:xfrm>
+          <a:prstGeom prst="rect">
+            <a:avLst/>
+          </a:prstGeom>
+          <a:noFill/>
+          <a:extLst>
+            <a:ext uri="{909E8E84-426E-40DD-AFC4-6F175D3DCCD1}">
+              <a14:hiddenFill xmlns:a14="http://schemas.microsoft.com/office/drawing/2010/main">
+                <a:solidFill>
+                  <a:srgbClr val="FFFFFF"/>
+                </a:solidFill>
+              </a14:hiddenFill>
+            </a:ext>
+          </a:extLst>
+        </p:spPr>
+      </p:pic>
+      <p:pic>
+        <p:nvPicPr>
+          <p:cNvPr id="1028" name="Picture 4" descr="Kaggle 2026 Company Profile: Valuation, Investors, Acquisition | PitchBook">
+            <a:extLst>
+              <a:ext uri="{FF2B5EF4-FFF2-40B4-BE49-F238E27FC236}">
+                <a16:creationId xmlns:a16="http://schemas.microsoft.com/office/drawing/2014/main" id="{62C2A34A-EADA-B3C1-F380-6C4BE9D5F41A}"/>
+              </a:ext>
+            </a:extLst>
+          </p:cNvPr>
+          <p:cNvPicPr>
+            <a:picLocks noChangeAspect="1" noChangeArrowheads="1"/>
+          </p:cNvPicPr>
+          <p:nvPr/>
+        </p:nvPicPr>
+        <p:blipFill>
+          <a:blip r:embed="rId3">
+            <a:extLst>
+              <a:ext uri="{28A0092B-C50C-407E-A947-70E740481C1C}">
+                <a14:useLocalDpi xmlns:a14="http://schemas.microsoft.com/office/drawing/2010/main" val="0"/>
+              </a:ext>
+            </a:extLst>
+          </a:blip>
+          <a:srcRect/>
+          <a:stretch>
+            <a:fillRect/>
+          </a:stretch>
+        </p:blipFill>
+        <p:spPr bwMode="auto">
+          <a:xfrm>
+            <a:off x="6538687" y="2411617"/>
+            <a:ext cx="2540000" cy="2540000"/>
+          </a:xfrm>
+          <a:prstGeom prst="rect">
+            <a:avLst/>
+          </a:prstGeom>
+          <a:noFill/>
+          <a:extLst>
+            <a:ext uri="{909E8E84-426E-40DD-AFC4-6F175D3DCCD1}">
+              <a14:hiddenFill xmlns:a14="http://schemas.microsoft.com/office/drawing/2010/main">
+                <a:solidFill>
+                  <a:srgbClr val="FFFFFF"/>
+                </a:solidFill>
+              </a14:hiddenFill>
+            </a:ext>
+          </a:extLst>
+        </p:spPr>
+      </p:pic>
     </p:spTree>
     <p:extLst>
       <p:ext uri="{BB962C8B-B14F-4D97-AF65-F5344CB8AC3E}">
@@ -4174,7 +4296,7 @@
         <p:spPr>
           <a:xfrm>
             <a:off x="1371600" y="1582057"/>
-            <a:ext cx="9601200" cy="4285343"/>
+            <a:ext cx="9601200" cy="4992914"/>
           </a:xfrm>
         </p:spPr>
         <p:txBody>
@@ -4208,10 +4330,6 @@
             </a:r>
           </a:p>
           <a:p>
-            <a:pPr lvl="1"/>
-            <a:endParaRPr lang="en-US" dirty="0"/>
-          </a:p>
-          <a:p>
             <a:r>
               <a:rPr lang="en-US" dirty="0"/>
               <a:t>SQLite was chosen for the database as it is simple to use and does not require an external database (it is stored in a single file). This makes it ideal for a project of this scale.</a:t>
@@ -4225,6 +4343,147 @@
           </a:p>
         </p:txBody>
       </p:sp>
+      <p:pic>
+        <p:nvPicPr>
+          <p:cNvPr id="2052" name="Picture 4" descr="fastapi · PyPI">
+            <a:extLst>
+              <a:ext uri="{FF2B5EF4-FFF2-40B4-BE49-F238E27FC236}">
+                <a16:creationId xmlns:a16="http://schemas.microsoft.com/office/drawing/2014/main" id="{ACDCB3B0-5C3B-0DAB-75E9-28DEC906F1F9}"/>
+              </a:ext>
+            </a:extLst>
+          </p:cNvPr>
+          <p:cNvPicPr>
+            <a:picLocks noChangeAspect="1" noChangeArrowheads="1"/>
+          </p:cNvPicPr>
+          <p:nvPr/>
+        </p:nvPicPr>
+        <p:blipFill>
+          <a:blip r:embed="rId2">
+            <a:extLst>
+              <a:ext uri="{28A0092B-C50C-407E-A947-70E740481C1C}">
+                <a14:useLocalDpi xmlns:a14="http://schemas.microsoft.com/office/drawing/2010/main" val="0"/>
+              </a:ext>
+            </a:extLst>
+          </a:blip>
+          <a:srcRect/>
+          <a:stretch>
+            <a:fillRect/>
+          </a:stretch>
+        </p:blipFill>
+        <p:spPr bwMode="auto">
+          <a:xfrm>
+            <a:off x="1186541" y="5074713"/>
+            <a:ext cx="3594100" cy="1297336"/>
+          </a:xfrm>
+          <a:prstGeom prst="rect">
+            <a:avLst/>
+          </a:prstGeom>
+          <a:noFill/>
+          <a:extLst>
+            <a:ext uri="{909E8E84-426E-40DD-AFC4-6F175D3DCCD1}">
+              <a14:hiddenFill xmlns:a14="http://schemas.microsoft.com/office/drawing/2010/main">
+                <a:solidFill>
+                  <a:srgbClr val="FFFFFF"/>
+                </a:solidFill>
+              </a14:hiddenFill>
+            </a:ext>
+          </a:extLst>
+        </p:spPr>
+      </p:pic>
+      <p:pic>
+        <p:nvPicPr>
+          <p:cNvPr id="2054" name="Picture 6" descr="Create a Database with SQLite, a short introduction">
+            <a:extLst>
+              <a:ext uri="{FF2B5EF4-FFF2-40B4-BE49-F238E27FC236}">
+                <a16:creationId xmlns:a16="http://schemas.microsoft.com/office/drawing/2014/main" id="{87F8154E-E37E-0A32-C5D3-027F083ED7B6}"/>
+              </a:ext>
+            </a:extLst>
+          </p:cNvPr>
+          <p:cNvPicPr>
+            <a:picLocks noChangeAspect="1" noChangeArrowheads="1"/>
+          </p:cNvPicPr>
+          <p:nvPr/>
+        </p:nvPicPr>
+        <p:blipFill>
+          <a:blip r:embed="rId3">
+            <a:extLst>
+              <a:ext uri="{28A0092B-C50C-407E-A947-70E740481C1C}">
+                <a14:useLocalDpi xmlns:a14="http://schemas.microsoft.com/office/drawing/2010/main" val="0"/>
+              </a:ext>
+            </a:extLst>
+          </a:blip>
+          <a:srcRect/>
+          <a:stretch>
+            <a:fillRect/>
+          </a:stretch>
+        </p:blipFill>
+        <p:spPr bwMode="auto">
+          <a:xfrm>
+            <a:off x="5038271" y="4871792"/>
+            <a:ext cx="2574471" cy="1703179"/>
+          </a:xfrm>
+          <a:prstGeom prst="rect">
+            <a:avLst/>
+          </a:prstGeom>
+          <a:noFill/>
+          <a:extLst>
+            <a:ext uri="{909E8E84-426E-40DD-AFC4-6F175D3DCCD1}">
+              <a14:hiddenFill xmlns:a14="http://schemas.microsoft.com/office/drawing/2010/main">
+                <a:solidFill>
+                  <a:srgbClr val="FFFFFF"/>
+                </a:solidFill>
+              </a14:hiddenFill>
+            </a:ext>
+          </a:extLst>
+        </p:spPr>
+      </p:pic>
+      <p:pic>
+        <p:nvPicPr>
+          <p:cNvPr id="2056" name="Picture 8" descr="SQLAlchemy - Wikipedia">
+            <a:extLst>
+              <a:ext uri="{FF2B5EF4-FFF2-40B4-BE49-F238E27FC236}">
+                <a16:creationId xmlns:a16="http://schemas.microsoft.com/office/drawing/2014/main" id="{55C00211-BF57-D08B-299C-B3E4D4282760}"/>
+              </a:ext>
+            </a:extLst>
+          </p:cNvPr>
+          <p:cNvPicPr>
+            <a:picLocks noChangeAspect="1" noChangeArrowheads="1"/>
+          </p:cNvPicPr>
+          <p:nvPr/>
+        </p:nvPicPr>
+        <p:blipFill>
+          <a:blip r:embed="rId4">
+            <a:extLst>
+              <a:ext uri="{28A0092B-C50C-407E-A947-70E740481C1C}">
+                <a14:useLocalDpi xmlns:a14="http://schemas.microsoft.com/office/drawing/2010/main" val="0"/>
+              </a:ext>
+            </a:extLst>
+          </a:blip>
+          <a:srcRect/>
+          <a:stretch>
+            <a:fillRect/>
+          </a:stretch>
+        </p:blipFill>
+        <p:spPr bwMode="auto">
+          <a:xfrm>
+            <a:off x="7870372" y="4985874"/>
+            <a:ext cx="2950028" cy="1475014"/>
+          </a:xfrm>
+          <a:prstGeom prst="rect">
+            <a:avLst/>
+          </a:prstGeom>
+          <a:noFill/>
+          <a:extLst>
+            <a:ext uri="{909E8E84-426E-40DD-AFC4-6F175D3DCCD1}">
+              <a14:hiddenFill xmlns:a14="http://schemas.microsoft.com/office/drawing/2010/main">
+                <a:solidFill>
+                  <a:srgbClr val="FFFFFF"/>
+                </a:solidFill>
+              </a14:hiddenFill>
+            </a:ext>
+          </a:extLst>
+        </p:spPr>
+      </p:pic>
     </p:spTree>
     <p:extLst>
       <p:ext uri="{BB962C8B-B14F-4D97-AF65-F5344CB8AC3E}">
@@ -4241,6 +4500,14 @@
 <file path=ppt/slides/slide4.xml><?xml version="1.0" encoding="utf-8"?>
 <p:sld xmlns:a="http://schemas.openxmlformats.org/drawingml/2006/main" xmlns:r="http://schemas.openxmlformats.org/officeDocument/2006/relationships" xmlns:p="http://schemas.openxmlformats.org/presentationml/2006/main">
   <p:cSld>
+    <p:bg>
+      <p:bgPr>
+        <a:solidFill>
+          <a:schemeClr val="bg2"/>
+        </a:solidFill>
+        <a:effectLst/>
+      </p:bgPr>
+    </p:bg>
     <p:spTree>
       <p:nvGrpSpPr>
         <p:cNvPr id="1" name="">
@@ -4279,8 +4546,8 @@
         </p:nvSpPr>
         <p:spPr>
           <a:xfrm>
-            <a:off x="1371600" y="685800"/>
-            <a:ext cx="9601200" cy="896257"/>
+            <a:off x="1023562" y="685800"/>
+            <a:ext cx="10493524" cy="1485900"/>
           </a:xfrm>
         </p:spPr>
         <p:txBody>
@@ -4290,9 +4557,72 @@
           <a:lstStyle/>
           <a:p>
             <a:r>
-              <a:rPr lang="en-US" dirty="0"/>
+              <a:rPr lang="en-US"/>
               <a:t>Architecture</a:t>
             </a:r>
+            <a:endParaRPr lang="en-US" dirty="0"/>
+          </a:p>
+        </p:txBody>
+      </p:sp>
+      <p:sp>
+        <p:nvSpPr>
+          <p:cNvPr id="11" name="Rectangle 10">
+            <a:extLst>
+              <a:ext uri="{FF2B5EF4-FFF2-40B4-BE49-F238E27FC236}">
+                <a16:creationId xmlns:a16="http://schemas.microsoft.com/office/drawing/2014/main" id="{B9F89C22-0475-4427-B7C8-0269AD40E3EC}"/>
+              </a:ext>
+              <a:ext uri="{C183D7F6-B498-43B3-948B-1728B52AA6E4}">
+                <adec:decorative xmlns:adec="http://schemas.microsoft.com/office/drawing/2017/decorative" val="1"/>
+              </a:ext>
+            </a:extLst>
+          </p:cNvPr>
+          <p:cNvSpPr>
+            <a:spLocks noGrp="1" noRot="1" noChangeAspect="1" noMove="1" noResize="1" noEditPoints="1" noAdjustHandles="1" noChangeArrowheads="1" noChangeShapeType="1" noTextEdit="1"/>
+          </p:cNvSpPr>
+          <p:nvPr>
+            <p:extLst>
+              <p:ext uri="{386F3935-93C4-4BCD-93E2-E3B085C9AB24}">
+                <p16:designElem xmlns:p16="http://schemas.microsoft.com/office/powerpoint/2015/main" val="1"/>
+              </p:ext>
+            </p:extLst>
+          </p:nvPr>
+        </p:nvSpPr>
+        <p:spPr>
+          <a:xfrm>
+            <a:off x="478095" y="376"/>
+            <a:ext cx="228600" cy="6858000"/>
+          </a:xfrm>
+          <a:prstGeom prst="rect">
+            <a:avLst/>
+          </a:prstGeom>
+          <a:solidFill>
+            <a:schemeClr val="tx2"/>
+          </a:solidFill>
+          <a:ln>
+            <a:noFill/>
+          </a:ln>
+        </p:spPr>
+        <p:style>
+          <a:lnRef idx="2">
+            <a:schemeClr val="accent1">
+              <a:shade val="50000"/>
+            </a:schemeClr>
+          </a:lnRef>
+          <a:fillRef idx="1">
+            <a:schemeClr val="accent1"/>
+          </a:fillRef>
+          <a:effectRef idx="0">
+            <a:schemeClr val="accent1"/>
+          </a:effectRef>
+          <a:fontRef idx="minor">
+            <a:schemeClr val="lt1"/>
+          </a:fontRef>
+        </p:style>
+        <p:txBody>
+          <a:bodyPr/>
+          <a:lstStyle/>
+          <a:p>
+            <a:endParaRPr lang="en-US"/>
           </a:p>
         </p:txBody>
       </p:sp>
@@ -4314,33 +4644,71 @@
         </p:nvSpPr>
         <p:spPr>
           <a:xfrm>
-            <a:off x="1371600" y="1582057"/>
-            <a:ext cx="9601200" cy="4285343"/>
-          </a:xfrm>
-        </p:spPr>
-        <p:txBody>
-          <a:bodyPr/>
+            <a:off x="1023562" y="2286000"/>
+            <a:ext cx="5072437" cy="3581400"/>
+          </a:xfrm>
+        </p:spPr>
+        <p:txBody>
+          <a:bodyPr>
+            <a:normAutofit lnSpcReduction="10000"/>
+          </a:bodyPr>
           <a:lstStyle/>
           <a:p>
             <a:r>
-              <a:rPr lang="en-US" dirty="0"/>
-              <a:t>The API uses a modular router-based architecture meaning that each resource has its own router file to separate endpoint logic for more manageable development.</a:t>
-            </a:r>
-          </a:p>
-          <a:p>
-            <a:r>
-              <a:rPr lang="en-US" dirty="0"/>
+              <a:rPr lang="en-US" sz="1800" dirty="0"/>
+              <a:t>The API uses a modular router-based architecture meaning that each resource has its own router file (stored in the routers folder) to separate endpoint logic for more manageable development.</a:t>
+            </a:r>
+          </a:p>
+          <a:p>
+            <a:endParaRPr lang="en-US" sz="1800" dirty="0"/>
+          </a:p>
+          <a:p>
+            <a:r>
+              <a:rPr lang="en-US" sz="1800" dirty="0"/>
               <a:t>Other components of the architecture such as authentication and database management are isolated into their own modules.</a:t>
             </a:r>
           </a:p>
           <a:p>
-            <a:r>
-              <a:rPr lang="en-US" dirty="0"/>
+            <a:endParaRPr lang="en-US" sz="1800" dirty="0"/>
+          </a:p>
+          <a:p>
+            <a:r>
+              <a:rPr lang="en-US" sz="1800" dirty="0"/>
               <a:t>The main application file’s sole purpose is to initialize the app and register routes.</a:t>
             </a:r>
           </a:p>
         </p:txBody>
       </p:sp>
+      <p:pic>
+        <p:nvPicPr>
+          <p:cNvPr id="6" name="Picture 5" descr="A screenshot of the project architecture from the README&#10;">
+            <a:extLst>
+              <a:ext uri="{FF2B5EF4-FFF2-40B4-BE49-F238E27FC236}">
+                <a16:creationId xmlns:a16="http://schemas.microsoft.com/office/drawing/2014/main" id="{A765D980-B401-1426-E647-C07B7C3F82D4}"/>
+              </a:ext>
+            </a:extLst>
+          </p:cNvPr>
+          <p:cNvPicPr>
+            <a:picLocks noChangeAspect="1"/>
+          </p:cNvPicPr>
+          <p:nvPr/>
+        </p:nvPicPr>
+        <p:blipFill>
+          <a:blip r:embed="rId2"/>
+          <a:stretch>
+            <a:fillRect/>
+          </a:stretch>
+        </p:blipFill>
+        <p:spPr>
+          <a:xfrm>
+            <a:off x="6412866" y="2009321"/>
+            <a:ext cx="5606144" cy="3924300"/>
+          </a:xfrm>
+          <a:prstGeom prst="rect">
+            <a:avLst/>
+          </a:prstGeom>
+        </p:spPr>
+      </p:pic>
     </p:spTree>
     <p:extLst>
       <p:ext uri="{BB962C8B-B14F-4D97-AF65-F5344CB8AC3E}">
@@ -4431,7 +4799,7 @@
         <p:spPr>
           <a:xfrm>
             <a:off x="1371600" y="1582057"/>
-            <a:ext cx="9601200" cy="4285343"/>
+            <a:ext cx="9702800" cy="4590143"/>
           </a:xfrm>
         </p:spPr>
         <p:txBody>
@@ -4443,7 +4811,7 @@
             </a:pPr>
             <a:r>
               <a:rPr lang="en-US" dirty="0"/>
-              <a:t>POST /users</a:t>
+              <a:t>POST /users - create a user, authentication, 201 response</a:t>
             </a:r>
           </a:p>
           <a:p>
@@ -4452,7 +4820,7 @@
             </a:pPr>
             <a:r>
               <a:rPr lang="en-US" dirty="0"/>
-              <a:t>GET /books/</a:t>
+              <a:t>GET /books/ - browse books with filters, pagination, search params</a:t>
             </a:r>
           </a:p>
           <a:p>
@@ -4461,7 +4829,7 @@
             </a:pPr>
             <a:r>
               <a:rPr lang="en-US" dirty="0"/>
-              <a:t>POST /reviews</a:t>
+              <a:t>POST /reviews – user-book relationship, validation</a:t>
             </a:r>
           </a:p>
           <a:p>
@@ -4470,7 +4838,7 @@
             </a:pPr>
             <a:r>
               <a:rPr lang="en-US" dirty="0"/>
-              <a:t>GET /users/1/reviews</a:t>
+              <a:t>GET /users/1/reviews – retrieve and filter reviews, query params, JSON response shape</a:t>
             </a:r>
           </a:p>
           <a:p>
@@ -4479,15 +4847,7 @@
             </a:pPr>
             <a:r>
               <a:rPr lang="en-US" dirty="0"/>
-              <a:t>GET /</a:t>
-            </a:r>
-            <a:r>
-              <a:rPr lang="en-US" dirty="0" err="1"/>
-              <a:t>reviews?book_id</a:t>
-            </a:r>
-            <a:r>
-              <a:rPr lang="en-US" dirty="0"/>
-              <a:t>=1</a:t>
+              <a:t>GET /reviews?book_id=1</a:t>
             </a:r>
           </a:p>
           <a:p>
@@ -4496,7 +4856,7 @@
             </a:pPr>
             <a:r>
               <a:rPr lang="en-US" dirty="0"/>
-              <a:t>GET /analytics/</a:t>
+              <a:t>GET /analytics/ - rating dist, top publishers, trends</a:t>
             </a:r>
           </a:p>
         </p:txBody>
@@ -4624,20 +4984,502 @@
           <a:p>
             <a:r>
               <a:rPr lang="en-US" dirty="0"/>
-              <a:t>One limitation would be that code reviews were not performed before each push or merge, which is a common practice </a:t>
-            </a:r>
-            <a:r>
-              <a:rPr lang="en-US"/>
-              <a:t>in team-based development.</a:t>
-            </a:r>
-            <a:endParaRPr lang="en-US" dirty="0"/>
-          </a:p>
-        </p:txBody>
-      </p:sp>
+              <a:t>One limitation would be that code reviews were not performed before each push or merge, which is a common practice in team-based development.</a:t>
+            </a:r>
+          </a:p>
+        </p:txBody>
+      </p:sp>
+      <p:pic>
+        <p:nvPicPr>
+          <p:cNvPr id="3074" name="Picture 2" descr="Unlocking the Power of GitHub: A ...">
+            <a:extLst>
+              <a:ext uri="{FF2B5EF4-FFF2-40B4-BE49-F238E27FC236}">
+                <a16:creationId xmlns:a16="http://schemas.microsoft.com/office/drawing/2014/main" id="{7A14462F-5710-5CFD-F443-24567A450016}"/>
+              </a:ext>
+            </a:extLst>
+          </p:cNvPr>
+          <p:cNvPicPr>
+            <a:picLocks noChangeAspect="1" noChangeArrowheads="1"/>
+          </p:cNvPicPr>
+          <p:nvPr/>
+        </p:nvPicPr>
+        <p:blipFill>
+          <a:blip r:embed="rId2">
+            <a:extLst>
+              <a:ext uri="{28A0092B-C50C-407E-A947-70E740481C1C}">
+                <a14:useLocalDpi xmlns:a14="http://schemas.microsoft.com/office/drawing/2010/main" val="0"/>
+              </a:ext>
+            </a:extLst>
+          </a:blip>
+          <a:srcRect/>
+          <a:stretch>
+            <a:fillRect/>
+          </a:stretch>
+        </p:blipFill>
+        <p:spPr bwMode="auto">
+          <a:xfrm>
+            <a:off x="7932964" y="302026"/>
+            <a:ext cx="3039836" cy="1120373"/>
+          </a:xfrm>
+          <a:prstGeom prst="rect">
+            <a:avLst/>
+          </a:prstGeom>
+          <a:noFill/>
+          <a:extLst>
+            <a:ext uri="{909E8E84-426E-40DD-AFC4-6F175D3DCCD1}">
+              <a14:hiddenFill xmlns:a14="http://schemas.microsoft.com/office/drawing/2010/main">
+                <a:solidFill>
+                  <a:srgbClr val="FFFFFF"/>
+                </a:solidFill>
+              </a14:hiddenFill>
+            </a:ext>
+          </a:extLst>
+        </p:spPr>
+      </p:pic>
     </p:spTree>
     <p:extLst>
       <p:ext uri="{BB962C8B-B14F-4D97-AF65-F5344CB8AC3E}">
         <p14:creationId xmlns:p14="http://schemas.microsoft.com/office/powerpoint/2010/main" val="2249047937"/>
+      </p:ext>
+    </p:extLst>
+  </p:cSld>
+  <p:clrMapOvr>
+    <a:masterClrMapping/>
+  </p:clrMapOvr>
+</p:sld>
+</file>
+
+<file path=ppt/slides/slide7.xml><?xml version="1.0" encoding="utf-8"?>
+<p:sld xmlns:a="http://schemas.openxmlformats.org/drawingml/2006/main" xmlns:r="http://schemas.openxmlformats.org/officeDocument/2006/relationships" xmlns:p="http://schemas.openxmlformats.org/presentationml/2006/main">
+  <p:cSld>
+    <p:spTree>
+      <p:nvGrpSpPr>
+        <p:cNvPr id="1" name="">
+          <a:extLst>
+            <a:ext uri="{FF2B5EF4-FFF2-40B4-BE49-F238E27FC236}">
+              <a16:creationId xmlns:a16="http://schemas.microsoft.com/office/drawing/2014/main" id="{95B04782-D6C1-87CE-CB97-F2CA2131A5A8}"/>
+            </a:ext>
+          </a:extLst>
+        </p:cNvPr>
+        <p:cNvGrpSpPr/>
+        <p:nvPr/>
+      </p:nvGrpSpPr>
+      <p:grpSpPr>
+        <a:xfrm>
+          <a:off x="0" y="0"/>
+          <a:ext cx="0" cy="0"/>
+          <a:chOff x="0" y="0"/>
+          <a:chExt cx="0" cy="0"/>
+        </a:xfrm>
+      </p:grpSpPr>
+      <p:sp>
+        <p:nvSpPr>
+          <p:cNvPr id="2" name="Title 1">
+            <a:extLst>
+              <a:ext uri="{FF2B5EF4-FFF2-40B4-BE49-F238E27FC236}">
+                <a16:creationId xmlns:a16="http://schemas.microsoft.com/office/drawing/2014/main" id="{3216448C-3139-CD7A-9F50-23CA7C585698}"/>
+              </a:ext>
+            </a:extLst>
+          </p:cNvPr>
+          <p:cNvSpPr>
+            <a:spLocks noGrp="1"/>
+          </p:cNvSpPr>
+          <p:nvPr>
+            <p:ph type="title"/>
+          </p:nvPr>
+        </p:nvSpPr>
+        <p:spPr>
+          <a:xfrm>
+            <a:off x="1371600" y="685800"/>
+            <a:ext cx="9601200" cy="896257"/>
+          </a:xfrm>
+        </p:spPr>
+        <p:txBody>
+          <a:bodyPr>
+            <a:normAutofit/>
+          </a:bodyPr>
+          <a:lstStyle/>
+          <a:p>
+            <a:r>
+              <a:rPr lang="en-US" dirty="0"/>
+              <a:t>GenAI usage</a:t>
+            </a:r>
+          </a:p>
+        </p:txBody>
+      </p:sp>
+      <p:sp>
+        <p:nvSpPr>
+          <p:cNvPr id="3" name="Content Placeholder 2">
+            <a:extLst>
+              <a:ext uri="{FF2B5EF4-FFF2-40B4-BE49-F238E27FC236}">
+                <a16:creationId xmlns:a16="http://schemas.microsoft.com/office/drawing/2014/main" id="{27C30091-FF88-887C-58BD-B4EF0400C8D0}"/>
+              </a:ext>
+            </a:extLst>
+          </p:cNvPr>
+          <p:cNvSpPr>
+            <a:spLocks noGrp="1"/>
+          </p:cNvSpPr>
+          <p:nvPr>
+            <p:ph idx="1"/>
+          </p:nvPr>
+        </p:nvSpPr>
+        <p:spPr>
+          <a:xfrm>
+            <a:off x="1371600" y="1582057"/>
+            <a:ext cx="9601200" cy="4285343"/>
+          </a:xfrm>
+        </p:spPr>
+        <p:txBody>
+          <a:bodyPr/>
+          <a:lstStyle/>
+          <a:p>
+            <a:r>
+              <a:rPr lang="en-US" dirty="0"/>
+              <a:t>Anthropic’s Claude AI was used all throughout this project in an assistive role and as a generative agent. </a:t>
+            </a:r>
+          </a:p>
+          <a:p>
+            <a:r>
+              <a:rPr lang="en-US" dirty="0"/>
+              <a:t>Firstly, Claude was used as a high-level planner and decision maker. It provided the pros and cons of each choice as well as a suggestion for the architecture and tech stack of the application.</a:t>
+            </a:r>
+          </a:p>
+          <a:p>
+            <a:r>
+              <a:rPr lang="en-US" dirty="0"/>
+              <a:t>It was used to generate file templates to make each feature easier to implement and iteratively develop. When bugs were discovered that were difficult to diagnose, Claude was used to identify the problems and solve them.</a:t>
+            </a:r>
+          </a:p>
+          <a:p>
+            <a:r>
+              <a:rPr lang="en-US" dirty="0"/>
+              <a:t>The test suite was also made with the help of Claude. The generated tests revealed some hidden errors in the database that had not been flagged yet.</a:t>
+            </a:r>
+          </a:p>
+          <a:p>
+            <a:pPr marL="0" indent="0">
+              <a:buNone/>
+            </a:pPr>
+            <a:endParaRPr lang="en-US" dirty="0"/>
+          </a:p>
+        </p:txBody>
+      </p:sp>
+      <p:pic>
+        <p:nvPicPr>
+          <p:cNvPr id="4102" name="Picture 6" descr="Mastering Claude Opus 4.1: Prompt ...">
+            <a:extLst>
+              <a:ext uri="{FF2B5EF4-FFF2-40B4-BE49-F238E27FC236}">
+                <a16:creationId xmlns:a16="http://schemas.microsoft.com/office/drawing/2014/main" id="{88335D89-4413-DB86-8A64-7CB0F1374F2F}"/>
+              </a:ext>
+            </a:extLst>
+          </p:cNvPr>
+          <p:cNvPicPr>
+            <a:picLocks noChangeAspect="1" noChangeArrowheads="1"/>
+          </p:cNvPicPr>
+          <p:nvPr/>
+        </p:nvPicPr>
+        <p:blipFill>
+          <a:blip r:embed="rId2">
+            <a:extLst>
+              <a:ext uri="{28A0092B-C50C-407E-A947-70E740481C1C}">
+                <a14:useLocalDpi xmlns:a14="http://schemas.microsoft.com/office/drawing/2010/main" val="0"/>
+              </a:ext>
+            </a:extLst>
+          </a:blip>
+          <a:srcRect/>
+          <a:stretch>
+            <a:fillRect/>
+          </a:stretch>
+        </p:blipFill>
+        <p:spPr bwMode="auto">
+          <a:xfrm>
+            <a:off x="5226361" y="5136193"/>
+            <a:ext cx="1739278" cy="1462414"/>
+          </a:xfrm>
+          <a:prstGeom prst="rect">
+            <a:avLst/>
+          </a:prstGeom>
+          <a:noFill/>
+          <a:extLst>
+            <a:ext uri="{909E8E84-426E-40DD-AFC4-6F175D3DCCD1}">
+              <a14:hiddenFill xmlns:a14="http://schemas.microsoft.com/office/drawing/2010/main">
+                <a:solidFill>
+                  <a:srgbClr val="FFFFFF"/>
+                </a:solidFill>
+              </a14:hiddenFill>
+            </a:ext>
+          </a:extLst>
+        </p:spPr>
+      </p:pic>
+    </p:spTree>
+    <p:extLst>
+      <p:ext uri="{BB962C8B-B14F-4D97-AF65-F5344CB8AC3E}">
+        <p14:creationId xmlns:p14="http://schemas.microsoft.com/office/powerpoint/2010/main" val="4142226937"/>
+      </p:ext>
+    </p:extLst>
+  </p:cSld>
+  <p:clrMapOvr>
+    <a:masterClrMapping/>
+  </p:clrMapOvr>
+</p:sld>
+</file>
+
+<file path=ppt/slides/slide8.xml><?xml version="1.0" encoding="utf-8"?>
+<p:sld xmlns:a="http://schemas.openxmlformats.org/drawingml/2006/main" xmlns:r="http://schemas.openxmlformats.org/officeDocument/2006/relationships" xmlns:p="http://schemas.openxmlformats.org/presentationml/2006/main">
+  <p:cSld>
+    <p:spTree>
+      <p:nvGrpSpPr>
+        <p:cNvPr id="1" name="">
+          <a:extLst>
+            <a:ext uri="{FF2B5EF4-FFF2-40B4-BE49-F238E27FC236}">
+              <a16:creationId xmlns:a16="http://schemas.microsoft.com/office/drawing/2014/main" id="{89C29473-93B7-976C-9E36-1516A58A1E6A}"/>
+            </a:ext>
+          </a:extLst>
+        </p:cNvPr>
+        <p:cNvGrpSpPr/>
+        <p:nvPr/>
+      </p:nvGrpSpPr>
+      <p:grpSpPr>
+        <a:xfrm>
+          <a:off x="0" y="0"/>
+          <a:ext cx="0" cy="0"/>
+          <a:chOff x="0" y="0"/>
+          <a:chExt cx="0" cy="0"/>
+        </a:xfrm>
+      </p:grpSpPr>
+      <p:sp>
+        <p:nvSpPr>
+          <p:cNvPr id="2" name="Title 1">
+            <a:extLst>
+              <a:ext uri="{FF2B5EF4-FFF2-40B4-BE49-F238E27FC236}">
+                <a16:creationId xmlns:a16="http://schemas.microsoft.com/office/drawing/2014/main" id="{C758F2DE-4875-63F4-EDD9-AEB0951A54F3}"/>
+              </a:ext>
+            </a:extLst>
+          </p:cNvPr>
+          <p:cNvSpPr>
+            <a:spLocks noGrp="1"/>
+          </p:cNvSpPr>
+          <p:nvPr>
+            <p:ph type="title"/>
+          </p:nvPr>
+        </p:nvSpPr>
+        <p:spPr>
+          <a:xfrm>
+            <a:off x="1371600" y="685800"/>
+            <a:ext cx="9601200" cy="896257"/>
+          </a:xfrm>
+        </p:spPr>
+        <p:txBody>
+          <a:bodyPr>
+            <a:normAutofit/>
+          </a:bodyPr>
+          <a:lstStyle/>
+          <a:p>
+            <a:r>
+              <a:rPr lang="en-US" dirty="0"/>
+              <a:t>Reflection</a:t>
+            </a:r>
+          </a:p>
+        </p:txBody>
+      </p:sp>
+      <p:sp>
+        <p:nvSpPr>
+          <p:cNvPr id="3" name="Content Placeholder 2">
+            <a:extLst>
+              <a:ext uri="{FF2B5EF4-FFF2-40B4-BE49-F238E27FC236}">
+                <a16:creationId xmlns:a16="http://schemas.microsoft.com/office/drawing/2014/main" id="{031ACCA6-EEDB-3A81-683F-1F5215CCD400}"/>
+              </a:ext>
+            </a:extLst>
+          </p:cNvPr>
+          <p:cNvSpPr>
+            <a:spLocks noGrp="1"/>
+          </p:cNvSpPr>
+          <p:nvPr>
+            <p:ph idx="1"/>
+          </p:nvPr>
+        </p:nvSpPr>
+        <p:spPr>
+          <a:xfrm>
+            <a:off x="1371600" y="1582057"/>
+            <a:ext cx="9601200" cy="4285343"/>
+          </a:xfrm>
+        </p:spPr>
+        <p:txBody>
+          <a:bodyPr>
+            <a:normAutofit fontScale="85000" lnSpcReduction="20000"/>
+          </a:bodyPr>
+          <a:lstStyle/>
+          <a:p>
+            <a:pPr marL="0" indent="0">
+              <a:spcBef>
+                <a:spcPts val="400"/>
+              </a:spcBef>
+              <a:buNone/>
+            </a:pPr>
+            <a:r>
+              <a:rPr lang="en-US" b="1" dirty="0">
+                <a:solidFill>
+                  <a:schemeClr val="tx1"/>
+                </a:solidFill>
+              </a:rPr>
+              <a:t>Challenges</a:t>
+            </a:r>
+          </a:p>
+          <a:p>
+            <a:pPr>
+              <a:spcBef>
+                <a:spcPts val="400"/>
+              </a:spcBef>
+            </a:pPr>
+            <a:r>
+              <a:rPr lang="en-US" dirty="0">
+                <a:solidFill>
+                  <a:schemeClr val="tx1"/>
+                </a:solidFill>
+              </a:rPr>
+              <a:t>Dataset swap mid-build - Original dataset lacked user rating metadata. Required refactoring multiple files and restructuring the project.</a:t>
+            </a:r>
+          </a:p>
+          <a:p>
+            <a:pPr>
+              <a:spcBef>
+                <a:spcPts val="400"/>
+              </a:spcBef>
+            </a:pPr>
+            <a:endParaRPr lang="en-US" dirty="0">
+              <a:solidFill>
+                <a:schemeClr val="tx1"/>
+              </a:solidFill>
+            </a:endParaRPr>
+          </a:p>
+          <a:p>
+            <a:pPr>
+              <a:spcBef>
+                <a:spcPts val="400"/>
+              </a:spcBef>
+            </a:pPr>
+            <a:r>
+              <a:rPr lang="en-US" dirty="0">
+                <a:solidFill>
+                  <a:schemeClr val="tx1"/>
+                </a:solidFill>
+              </a:rPr>
+              <a:t>Tricky data bugs - Whitespace in CSV header and DB representation issues — simple fixes but hard to diagnose.</a:t>
+            </a:r>
+          </a:p>
+          <a:p>
+            <a:pPr>
+              <a:spcBef>
+                <a:spcPts val="400"/>
+              </a:spcBef>
+            </a:pPr>
+            <a:endParaRPr lang="en-US" dirty="0">
+              <a:solidFill>
+                <a:schemeClr val="tx1"/>
+              </a:solidFill>
+            </a:endParaRPr>
+          </a:p>
+          <a:p>
+            <a:pPr marL="0" indent="0">
+              <a:spcBef>
+                <a:spcPts val="400"/>
+              </a:spcBef>
+              <a:buNone/>
+            </a:pPr>
+            <a:r>
+              <a:rPr lang="en-US" b="1" dirty="0">
+                <a:solidFill>
+                  <a:schemeClr val="tx1"/>
+                </a:solidFill>
+              </a:rPr>
+              <a:t>Lessons Learned</a:t>
+            </a:r>
+          </a:p>
+          <a:p>
+            <a:pPr>
+              <a:spcBef>
+                <a:spcPts val="400"/>
+              </a:spcBef>
+            </a:pPr>
+            <a:r>
+              <a:rPr lang="en-US" dirty="0">
+                <a:solidFill>
+                  <a:schemeClr val="tx1"/>
+                </a:solidFill>
+              </a:rPr>
+              <a:t>Understand data first - Exploring the dataset before designing endpoints avoids costly rework.</a:t>
+            </a:r>
+          </a:p>
+          <a:p>
+            <a:pPr>
+              <a:spcBef>
+                <a:spcPts val="400"/>
+              </a:spcBef>
+            </a:pPr>
+            <a:endParaRPr lang="en-US" dirty="0">
+              <a:solidFill>
+                <a:schemeClr val="tx1"/>
+              </a:solidFill>
+            </a:endParaRPr>
+          </a:p>
+          <a:p>
+            <a:pPr>
+              <a:spcBef>
+                <a:spcPts val="400"/>
+              </a:spcBef>
+            </a:pPr>
+            <a:r>
+              <a:rPr lang="en-US" dirty="0">
+                <a:solidFill>
+                  <a:schemeClr val="tx1"/>
+                </a:solidFill>
+              </a:rPr>
+              <a:t>Modular design pays off </a:t>
+            </a:r>
+            <a:r>
+              <a:rPr lang="en-US" b="1" dirty="0">
+                <a:solidFill>
+                  <a:schemeClr val="tx1"/>
+                </a:solidFill>
+              </a:rPr>
+              <a:t>- </a:t>
+            </a:r>
+            <a:r>
+              <a:rPr lang="en-US" dirty="0">
+                <a:solidFill>
+                  <a:schemeClr val="tx1"/>
+                </a:solidFill>
+              </a:rPr>
+              <a:t>Router-based separation made debugging and iteration much faster.</a:t>
+            </a:r>
+          </a:p>
+          <a:p>
+            <a:pPr marL="0" indent="0">
+              <a:buNone/>
+            </a:pPr>
+            <a:endParaRPr lang="en-US" dirty="0"/>
+          </a:p>
+          <a:p>
+            <a:pPr marL="0" indent="0">
+              <a:buNone/>
+            </a:pPr>
+            <a:r>
+              <a:rPr lang="en-US" b="1" dirty="0"/>
+              <a:t>Future Work</a:t>
+            </a:r>
+          </a:p>
+          <a:p>
+            <a:r>
+              <a:rPr lang="en-US" dirty="0"/>
+              <a:t>In the future, I would add a recommendation endpoint that, given a book by ID, returns similar reads.</a:t>
+            </a:r>
+          </a:p>
+        </p:txBody>
+      </p:sp>
+    </p:spTree>
+    <p:extLst>
+      <p:ext uri="{BB962C8B-B14F-4D97-AF65-F5344CB8AC3E}">
+        <p14:creationId xmlns:p14="http://schemas.microsoft.com/office/powerpoint/2010/main" val="2271562488"/>
       </p:ext>
     </p:extLst>
   </p:cSld>

--- a/Presentation.pptx
+++ b/Presentation.pptx
@@ -111,6 +111,11 @@
       </a:defRPr>
     </a:lvl9pPr>
   </p:defaultTextStyle>
+  <p:extLst>
+    <p:ext uri="{EFAFB233-063F-42B5-8137-9DF3F51BA10A}">
+      <p15:sldGuideLst xmlns:p15="http://schemas.microsoft.com/office/powerpoint/2012/main"/>
+    </p:ext>
+  </p:extLst>
 </p:presentation>
 </file>
 
@@ -283,7 +288,7 @@
           <a:p>
             <a:fld id="{D1DB4B54-C624-3E4C-8A7A-BAD2D4F658F6}" type="datetimeFigureOut">
               <a:rPr lang="en-US" smtClean="0"/>
-              <a:t>3/13/26</a:t>
+              <a:t>3/14/26</a:t>
             </a:fld>
             <a:endParaRPr lang="en-US"/>
           </a:p>
@@ -627,7 +632,7 @@
           <a:p>
             <a:fld id="{D1DB4B54-C624-3E4C-8A7A-BAD2D4F658F6}" type="datetimeFigureOut">
               <a:rPr lang="en-US" smtClean="0"/>
-              <a:t>3/13/26</a:t>
+              <a:t>3/14/26</a:t>
             </a:fld>
             <a:endParaRPr lang="en-US"/>
           </a:p>
@@ -807,7 +812,7 @@
           <a:p>
             <a:fld id="{D1DB4B54-C624-3E4C-8A7A-BAD2D4F658F6}" type="datetimeFigureOut">
               <a:rPr lang="en-US" smtClean="0"/>
-              <a:t>3/13/26</a:t>
+              <a:t>3/14/26</a:t>
             </a:fld>
             <a:endParaRPr lang="en-US"/>
           </a:p>
@@ -977,7 +982,7 @@
           <a:p>
             <a:fld id="{D1DB4B54-C624-3E4C-8A7A-BAD2D4F658F6}" type="datetimeFigureOut">
               <a:rPr lang="en-US" smtClean="0"/>
-              <a:t>3/13/26</a:t>
+              <a:t>3/14/26</a:t>
             </a:fld>
             <a:endParaRPr lang="en-US"/>
           </a:p>
@@ -1254,7 +1259,7 @@
           <a:p>
             <a:fld id="{D1DB4B54-C624-3E4C-8A7A-BAD2D4F658F6}" type="datetimeFigureOut">
               <a:rPr lang="en-US" smtClean="0"/>
-              <a:t>3/13/26</a:t>
+              <a:t>3/14/26</a:t>
             </a:fld>
             <a:endParaRPr lang="en-US"/>
           </a:p>
@@ -1655,7 +1660,7 @@
           <a:p>
             <a:fld id="{D1DB4B54-C624-3E4C-8A7A-BAD2D4F658F6}" type="datetimeFigureOut">
               <a:rPr lang="en-US" smtClean="0"/>
-              <a:t>3/13/26</a:t>
+              <a:t>3/14/26</a:t>
             </a:fld>
             <a:endParaRPr lang="en-US"/>
           </a:p>
@@ -2132,7 +2137,7 @@
           <a:p>
             <a:fld id="{D1DB4B54-C624-3E4C-8A7A-BAD2D4F658F6}" type="datetimeFigureOut">
               <a:rPr lang="en-US" smtClean="0"/>
-              <a:t>3/13/26</a:t>
+              <a:t>3/14/26</a:t>
             </a:fld>
             <a:endParaRPr lang="en-US"/>
           </a:p>
@@ -2250,7 +2255,7 @@
           <a:p>
             <a:fld id="{D1DB4B54-C624-3E4C-8A7A-BAD2D4F658F6}" type="datetimeFigureOut">
               <a:rPr lang="en-US" smtClean="0"/>
-              <a:t>3/13/26</a:t>
+              <a:t>3/14/26</a:t>
             </a:fld>
             <a:endParaRPr lang="en-US"/>
           </a:p>
@@ -2345,7 +2350,7 @@
           <a:p>
             <a:fld id="{D1DB4B54-C624-3E4C-8A7A-BAD2D4F658F6}" type="datetimeFigureOut">
               <a:rPr lang="en-US" smtClean="0"/>
-              <a:t>3/13/26</a:t>
+              <a:t>3/14/26</a:t>
             </a:fld>
             <a:endParaRPr lang="en-US"/>
           </a:p>
@@ -2698,7 +2703,7 @@
           <a:p>
             <a:fld id="{D1DB4B54-C624-3E4C-8A7A-BAD2D4F658F6}" type="datetimeFigureOut">
               <a:rPr lang="en-US" smtClean="0"/>
-              <a:t>3/13/26</a:t>
+              <a:t>3/14/26</a:t>
             </a:fld>
             <a:endParaRPr lang="en-US"/>
           </a:p>
@@ -3100,7 +3105,7 @@
           <a:p>
             <a:fld id="{D1DB4B54-C624-3E4C-8A7A-BAD2D4F658F6}" type="datetimeFigureOut">
               <a:rPr lang="en-US" smtClean="0"/>
-              <a:t>3/13/26</a:t>
+              <a:t>3/14/26</a:t>
             </a:fld>
             <a:endParaRPr lang="en-US"/>
           </a:p>
@@ -3385,7 +3390,7 @@
           <a:p>
             <a:fld id="{D1DB4B54-C624-3E4C-8A7A-BAD2D4F658F6}" type="datetimeFigureOut">
               <a:rPr lang="en-US" smtClean="0"/>
-              <a:t>3/13/26</a:t>
+              <a:t>3/14/26</a:t>
             </a:fld>
             <a:endParaRPr lang="en-US"/>
           </a:p>
@@ -4859,6 +4864,24 @@
               <a:t>GET /analytics/ - rating dist, top publishers, trends</a:t>
             </a:r>
           </a:p>
+          <a:p>
+            <a:pPr marL="457200" indent="-457200">
+              <a:buAutoNum type="arabicPeriod"/>
+            </a:pPr>
+            <a:endParaRPr lang="en-US" dirty="0"/>
+          </a:p>
+          <a:p>
+            <a:pPr marL="0" indent="0">
+              <a:buNone/>
+            </a:pPr>
+            <a:r>
+              <a:rPr lang="en-US" dirty="0">
+                <a:hlinkClick r:id="rId2"/>
+              </a:rPr>
+              <a:t>https://bookvault-api-wth1.onrender.com/</a:t>
+            </a:r>
+            <a:endParaRPr lang="en-US" dirty="0"/>
+          </a:p>
         </p:txBody>
       </p:sp>
     </p:spTree>
